--- a/ECE1390_Lecture2.pptx
+++ b/ECE1390_Lecture2.pptx
@@ -5,7 +5,7 @@
     <p:sldMasterId id="2147483648" r:id="rId1"/>
   </p:sldMasterIdLst>
   <p:notesMasterIdLst>
-    <p:notesMasterId r:id="rId22"/>
+    <p:notesMasterId r:id="rId23"/>
   </p:notesMasterIdLst>
   <p:sldIdLst>
     <p:sldId id="256" r:id="rId2"/>
@@ -19,15 +19,16 @@
     <p:sldId id="348" r:id="rId10"/>
     <p:sldId id="349" r:id="rId11"/>
     <p:sldId id="350" r:id="rId12"/>
-    <p:sldId id="335" r:id="rId13"/>
-    <p:sldId id="337" r:id="rId14"/>
-    <p:sldId id="338" r:id="rId15"/>
-    <p:sldId id="339" r:id="rId16"/>
-    <p:sldId id="340" r:id="rId17"/>
-    <p:sldId id="351" r:id="rId18"/>
-    <p:sldId id="352" r:id="rId19"/>
-    <p:sldId id="283" r:id="rId20"/>
-    <p:sldId id="320" r:id="rId21"/>
+    <p:sldId id="353" r:id="rId13"/>
+    <p:sldId id="335" r:id="rId14"/>
+    <p:sldId id="337" r:id="rId15"/>
+    <p:sldId id="338" r:id="rId16"/>
+    <p:sldId id="339" r:id="rId17"/>
+    <p:sldId id="340" r:id="rId18"/>
+    <p:sldId id="351" r:id="rId19"/>
+    <p:sldId id="352" r:id="rId20"/>
+    <p:sldId id="283" r:id="rId21"/>
+    <p:sldId id="320" r:id="rId22"/>
   </p:sldIdLst>
   <p:sldSz cx="12192000" cy="6858000"/>
   <p:notesSz cx="6858000" cy="9144000"/>
@@ -216,7 +217,7 @@
           <a:p>
             <a:fld id="{460182BA-D6B2-8C4C-A437-30BC8B3E8EFF}" type="datetimeFigureOut">
               <a:rPr lang="en-US" smtClean="0"/>
-              <a:t>8/7/24</a:t>
+              <a:t>8/14/24</a:t>
             </a:fld>
             <a:endParaRPr lang="en-US"/>
           </a:p>
@@ -714,7 +715,7 @@
           <a:p>
             <a:fld id="{13E9B49C-C8FD-4344-8CD3-ED4C91409D68}" type="datetimeFigureOut">
               <a:rPr lang="en-US" smtClean="0"/>
-              <a:t>8/7/24</a:t>
+              <a:t>8/14/24</a:t>
             </a:fld>
             <a:endParaRPr lang="en-US"/>
           </a:p>
@@ -912,7 +913,7 @@
           <a:p>
             <a:fld id="{13E9B49C-C8FD-4344-8CD3-ED4C91409D68}" type="datetimeFigureOut">
               <a:rPr lang="en-US" smtClean="0"/>
-              <a:t>8/7/24</a:t>
+              <a:t>8/14/24</a:t>
             </a:fld>
             <a:endParaRPr lang="en-US"/>
           </a:p>
@@ -1120,7 +1121,7 @@
           <a:p>
             <a:fld id="{13E9B49C-C8FD-4344-8CD3-ED4C91409D68}" type="datetimeFigureOut">
               <a:rPr lang="en-US" smtClean="0"/>
-              <a:t>8/7/24</a:t>
+              <a:t>8/14/24</a:t>
             </a:fld>
             <a:endParaRPr lang="en-US"/>
           </a:p>
@@ -1318,7 +1319,7 @@
           <a:p>
             <a:fld id="{13E9B49C-C8FD-4344-8CD3-ED4C91409D68}" type="datetimeFigureOut">
               <a:rPr lang="en-US" smtClean="0"/>
-              <a:t>8/7/24</a:t>
+              <a:t>8/14/24</a:t>
             </a:fld>
             <a:endParaRPr lang="en-US"/>
           </a:p>
@@ -1593,7 +1594,7 @@
           <a:p>
             <a:fld id="{13E9B49C-C8FD-4344-8CD3-ED4C91409D68}" type="datetimeFigureOut">
               <a:rPr lang="en-US" smtClean="0"/>
-              <a:t>8/7/24</a:t>
+              <a:t>8/14/24</a:t>
             </a:fld>
             <a:endParaRPr lang="en-US"/>
           </a:p>
@@ -1858,7 +1859,7 @@
           <a:p>
             <a:fld id="{13E9B49C-C8FD-4344-8CD3-ED4C91409D68}" type="datetimeFigureOut">
               <a:rPr lang="en-US" smtClean="0"/>
-              <a:t>8/7/24</a:t>
+              <a:t>8/14/24</a:t>
             </a:fld>
             <a:endParaRPr lang="en-US"/>
           </a:p>
@@ -2270,7 +2271,7 @@
           <a:p>
             <a:fld id="{13E9B49C-C8FD-4344-8CD3-ED4C91409D68}" type="datetimeFigureOut">
               <a:rPr lang="en-US" smtClean="0"/>
-              <a:t>8/7/24</a:t>
+              <a:t>8/14/24</a:t>
             </a:fld>
             <a:endParaRPr lang="en-US"/>
           </a:p>
@@ -2411,7 +2412,7 @@
           <a:p>
             <a:fld id="{13E9B49C-C8FD-4344-8CD3-ED4C91409D68}" type="datetimeFigureOut">
               <a:rPr lang="en-US" smtClean="0"/>
-              <a:t>8/7/24</a:t>
+              <a:t>8/14/24</a:t>
             </a:fld>
             <a:endParaRPr lang="en-US"/>
           </a:p>
@@ -2524,7 +2525,7 @@
           <a:p>
             <a:fld id="{13E9B49C-C8FD-4344-8CD3-ED4C91409D68}" type="datetimeFigureOut">
               <a:rPr lang="en-US" smtClean="0"/>
-              <a:t>8/7/24</a:t>
+              <a:t>8/14/24</a:t>
             </a:fld>
             <a:endParaRPr lang="en-US"/>
           </a:p>
@@ -2835,7 +2836,7 @@
           <a:p>
             <a:fld id="{13E9B49C-C8FD-4344-8CD3-ED4C91409D68}" type="datetimeFigureOut">
               <a:rPr lang="en-US" smtClean="0"/>
-              <a:t>8/7/24</a:t>
+              <a:t>8/14/24</a:t>
             </a:fld>
             <a:endParaRPr lang="en-US"/>
           </a:p>
@@ -3123,7 +3124,7 @@
           <a:p>
             <a:fld id="{13E9B49C-C8FD-4344-8CD3-ED4C91409D68}" type="datetimeFigureOut">
               <a:rPr lang="en-US" smtClean="0"/>
-              <a:t>8/7/24</a:t>
+              <a:t>8/14/24</a:t>
             </a:fld>
             <a:endParaRPr lang="en-US"/>
           </a:p>
@@ -3364,7 +3365,7 @@
           <a:p>
             <a:fld id="{13E9B49C-C8FD-4344-8CD3-ED4C91409D68}" type="datetimeFigureOut">
               <a:rPr lang="en-US" smtClean="0"/>
-              <a:t>8/7/24</a:t>
+              <a:t>8/14/24</a:t>
             </a:fld>
             <a:endParaRPr lang="en-US"/>
           </a:p>
@@ -4772,31 +4773,6 @@
       </p:grpSpPr>
       <p:sp>
         <p:nvSpPr>
-          <p:cNvPr id="2" name="Title 1">
-            <a:extLst>
-              <a:ext uri="{FF2B5EF4-FFF2-40B4-BE49-F238E27FC236}">
-                <a16:creationId xmlns:a16="http://schemas.microsoft.com/office/drawing/2014/main" id="{66059369-A63E-EB04-A3AE-CFC4176390DF}"/>
-              </a:ext>
-            </a:extLst>
-          </p:cNvPr>
-          <p:cNvSpPr>
-            <a:spLocks noGrp="1"/>
-          </p:cNvSpPr>
-          <p:nvPr>
-            <p:ph type="title"/>
-          </p:nvPr>
-        </p:nvSpPr>
-        <p:spPr/>
-        <p:txBody>
-          <a:bodyPr/>
-          <a:lstStyle/>
-          <a:p>
-            <a:endParaRPr lang="en-US"/>
-          </a:p>
-        </p:txBody>
-      </p:sp>
-      <p:sp>
-        <p:nvSpPr>
           <p:cNvPr id="5" name="TextBox 4">
             <a:extLst>
               <a:ext uri="{FF2B5EF4-FFF2-40B4-BE49-F238E27FC236}">
@@ -4984,6 +4960,39 @@
           </a:p>
         </p:txBody>
       </p:sp>
+      <p:sp>
+        <p:nvSpPr>
+          <p:cNvPr id="3" name="Title 1">
+            <a:extLst>
+              <a:ext uri="{FF2B5EF4-FFF2-40B4-BE49-F238E27FC236}">
+                <a16:creationId xmlns:a16="http://schemas.microsoft.com/office/drawing/2014/main" id="{A53EF508-E926-7250-7523-F65622201844}"/>
+              </a:ext>
+            </a:extLst>
+          </p:cNvPr>
+          <p:cNvSpPr>
+            <a:spLocks noGrp="1"/>
+          </p:cNvSpPr>
+          <p:nvPr>
+            <p:ph type="title"/>
+          </p:nvPr>
+        </p:nvSpPr>
+        <p:spPr>
+          <a:xfrm>
+            <a:off x="749300" y="195355"/>
+            <a:ext cx="10515600" cy="1325563"/>
+          </a:xfrm>
+        </p:spPr>
+        <p:txBody>
+          <a:bodyPr/>
+          <a:lstStyle/>
+          <a:p>
+            <a:r>
+              <a:rPr lang="en-US" dirty="0"/>
+              <a:t>2D convolution as a matrix operation</a:t>
+            </a:r>
+          </a:p>
+        </p:txBody>
+      </p:sp>
     </p:spTree>
     <p:extLst>
       <p:ext uri="{BB962C8B-B14F-4D97-AF65-F5344CB8AC3E}">
@@ -4998,6 +5007,194 @@
 </file>
 
 <file path=ppt/slides/slide12.xml><?xml version="1.0" encoding="utf-8"?>
+<p:sld xmlns:a="http://schemas.openxmlformats.org/drawingml/2006/main" xmlns:r="http://schemas.openxmlformats.org/officeDocument/2006/relationships" xmlns:p="http://schemas.openxmlformats.org/presentationml/2006/main">
+  <p:cSld>
+    <p:spTree>
+      <p:nvGrpSpPr>
+        <p:cNvPr id="1" name=""/>
+        <p:cNvGrpSpPr/>
+        <p:nvPr/>
+      </p:nvGrpSpPr>
+      <p:grpSpPr>
+        <a:xfrm>
+          <a:off x="0" y="0"/>
+          <a:ext cx="0" cy="0"/>
+          <a:chOff x="0" y="0"/>
+          <a:chExt cx="0" cy="0"/>
+        </a:xfrm>
+      </p:grpSpPr>
+      <p:sp>
+        <p:nvSpPr>
+          <p:cNvPr id="3" name="Title 1">
+            <a:extLst>
+              <a:ext uri="{FF2B5EF4-FFF2-40B4-BE49-F238E27FC236}">
+                <a16:creationId xmlns:a16="http://schemas.microsoft.com/office/drawing/2014/main" id="{A53EF508-E926-7250-7523-F65622201844}"/>
+              </a:ext>
+            </a:extLst>
+          </p:cNvPr>
+          <p:cNvSpPr>
+            <a:spLocks noGrp="1"/>
+          </p:cNvSpPr>
+          <p:nvPr>
+            <p:ph type="title"/>
+          </p:nvPr>
+        </p:nvSpPr>
+        <p:spPr>
+          <a:xfrm>
+            <a:off x="749300" y="195355"/>
+            <a:ext cx="10515600" cy="1325563"/>
+          </a:xfrm>
+        </p:spPr>
+        <p:txBody>
+          <a:bodyPr/>
+          <a:lstStyle/>
+          <a:p>
+            <a:r>
+              <a:rPr lang="en-US" dirty="0"/>
+              <a:t>2D convolution as a matrix operation</a:t>
+            </a:r>
+          </a:p>
+        </p:txBody>
+      </p:sp>
+      <p:sp>
+        <p:nvSpPr>
+          <p:cNvPr id="4" name="TextBox 3">
+            <a:extLst>
+              <a:ext uri="{FF2B5EF4-FFF2-40B4-BE49-F238E27FC236}">
+                <a16:creationId xmlns:a16="http://schemas.microsoft.com/office/drawing/2014/main" id="{806A0B17-D1DB-11B5-AE47-305F267557CF}"/>
+              </a:ext>
+            </a:extLst>
+          </p:cNvPr>
+          <p:cNvSpPr txBox="1"/>
+          <p:nvPr/>
+        </p:nvSpPr>
+        <p:spPr>
+          <a:xfrm>
+            <a:off x="749300" y="1550493"/>
+            <a:ext cx="8752115" cy="923330"/>
+          </a:xfrm>
+          <a:prstGeom prst="rect">
+            <a:avLst/>
+          </a:prstGeom>
+          <a:noFill/>
+        </p:spPr>
+        <p:txBody>
+          <a:bodyPr wrap="square">
+            <a:spAutoFit/>
+          </a:bodyPr>
+          <a:lstStyle/>
+          <a:p>
+            <a:r>
+              <a:rPr lang="en-US" b="0" dirty="0">
+                <a:solidFill>
+                  <a:srgbClr val="000000"/>
+                </a:solidFill>
+                <a:effectLst/>
+                <a:highlight>
+                  <a:srgbClr val="FFFFFF"/>
+                </a:highlight>
+                <a:latin typeface="Menlo" panose="020B0609030804020204" pitchFamily="49" charset="0"/>
+              </a:rPr>
+              <a:t>kernel= </a:t>
+            </a:r>
+            <a:r>
+              <a:rPr lang="en-US" b="0" dirty="0" err="1">
+                <a:solidFill>
+                  <a:srgbClr val="000000"/>
+                </a:solidFill>
+                <a:effectLst/>
+                <a:highlight>
+                  <a:srgbClr val="FFFFFF"/>
+                </a:highlight>
+                <a:latin typeface="Menlo" panose="020B0609030804020204" pitchFamily="49" charset="0"/>
+              </a:rPr>
+              <a:t>np.ones</a:t>
+            </a:r>
+            <a:r>
+              <a:rPr lang="en-US" b="0" dirty="0">
+                <a:solidFill>
+                  <a:srgbClr val="000000"/>
+                </a:solidFill>
+                <a:effectLst/>
+                <a:highlight>
+                  <a:srgbClr val="FFFFFF"/>
+                </a:highlight>
+                <a:latin typeface="Menlo" panose="020B0609030804020204" pitchFamily="49" charset="0"/>
+              </a:rPr>
+              <a:t>((3,3))/9</a:t>
+            </a:r>
+          </a:p>
+          <a:p>
+            <a:r>
+              <a:rPr lang="en-US" b="0" dirty="0">
+                <a:solidFill>
+                  <a:srgbClr val="000000"/>
+                </a:solidFill>
+                <a:effectLst/>
+                <a:highlight>
+                  <a:srgbClr val="FFFFFF"/>
+                </a:highlight>
+                <a:latin typeface="Menlo" panose="020B0609030804020204" pitchFamily="49" charset="0"/>
+              </a:rPr>
+              <a:t> </a:t>
+            </a:r>
+          </a:p>
+          <a:p>
+            <a:r>
+              <a:rPr lang="en-US" dirty="0" err="1">
+                <a:solidFill>
+                  <a:srgbClr val="000000"/>
+                </a:solidFill>
+                <a:highlight>
+                  <a:srgbClr val="FFFFFF"/>
+                </a:highlight>
+                <a:latin typeface="Menlo" panose="020B0609030804020204" pitchFamily="49" charset="0"/>
+              </a:rPr>
+              <a:t>img_smooth</a:t>
+            </a:r>
+            <a:r>
+              <a:rPr lang="en-US" dirty="0">
+                <a:solidFill>
+                  <a:srgbClr val="000000"/>
+                </a:solidFill>
+                <a:highlight>
+                  <a:srgbClr val="FFFFFF"/>
+                </a:highlight>
+                <a:latin typeface="Menlo" panose="020B0609030804020204" pitchFamily="49" charset="0"/>
+              </a:rPr>
+              <a:t> </a:t>
+            </a:r>
+            <a:r>
+              <a:rPr lang="en-US" b="0" dirty="0">
+                <a:solidFill>
+                  <a:srgbClr val="000000"/>
+                </a:solidFill>
+                <a:effectLst/>
+                <a:highlight>
+                  <a:srgbClr val="FFFFFF"/>
+                </a:highlight>
+                <a:latin typeface="Menlo" panose="020B0609030804020204" pitchFamily="49" charset="0"/>
+              </a:rPr>
+              <a:t>= cv2.filter2D(img,-1,kernel)</a:t>
+            </a:r>
+            <a:endParaRPr lang="en-US" dirty="0"/>
+          </a:p>
+        </p:txBody>
+      </p:sp>
+    </p:spTree>
+    <p:extLst>
+      <p:ext uri="{BB962C8B-B14F-4D97-AF65-F5344CB8AC3E}">
+        <p14:creationId xmlns:p14="http://schemas.microsoft.com/office/powerpoint/2010/main" val="1383417997"/>
+      </p:ext>
+    </p:extLst>
+  </p:cSld>
+  <p:clrMapOvr>
+    <a:masterClrMapping/>
+  </p:clrMapOvr>
+</p:sld>
+</file>
+
+<file path=ppt/slides/slide13.xml><?xml version="1.0" encoding="utf-8"?>
 <p:sld xmlns:a="http://schemas.openxmlformats.org/drawingml/2006/main" xmlns:r="http://schemas.openxmlformats.org/officeDocument/2006/relationships" xmlns:p="http://schemas.openxmlformats.org/presentationml/2006/main">
   <p:cSld>
     <p:spTree>
@@ -12502,7 +12699,7 @@
 </p:sld>
 </file>
 
-<file path=ppt/slides/slide13.xml><?xml version="1.0" encoding="utf-8"?>
+<file path=ppt/slides/slide14.xml><?xml version="1.0" encoding="utf-8"?>
 <p:sld xmlns:a="http://schemas.openxmlformats.org/drawingml/2006/main" xmlns:r="http://schemas.openxmlformats.org/officeDocument/2006/relationships" xmlns:p="http://schemas.openxmlformats.org/presentationml/2006/main">
   <p:cSld>
     <p:spTree>
@@ -12549,6 +12746,10 @@
               <a:rPr lang="en-US" dirty="0"/>
               <a:t>Morphological Operations</a:t>
             </a:r>
+            <a:br>
+              <a:rPr lang="en-US" dirty="0"/>
+            </a:br>
+            <a:endParaRPr lang="en-US" dirty="0"/>
           </a:p>
         </p:txBody>
       </p:sp>
@@ -13370,8 +13571,8 @@
         </p:nvSpPr>
         <p:spPr>
           <a:xfrm>
-            <a:off x="2716033" y="1656217"/>
-            <a:ext cx="5069067" cy="646331"/>
+            <a:off x="3728405" y="2025487"/>
+            <a:ext cx="6329995" cy="646331"/>
           </a:xfrm>
           <a:prstGeom prst="rect">
             <a:avLst/>
@@ -13386,7 +13587,7 @@
           <a:p>
             <a:r>
               <a:rPr lang="en-US" sz="3600" b="1" dirty="0"/>
-              <a:t>Kernel is Boolean!</a:t>
+              <a:t>Kernel is Boolean (mask)</a:t>
             </a:r>
           </a:p>
         </p:txBody>
@@ -13436,6 +13637,60 @@
           </a:fontRef>
         </p:style>
       </p:cxnSp>
+      <p:sp>
+        <p:nvSpPr>
+          <p:cNvPr id="4" name="Title 1">
+            <a:extLst>
+              <a:ext uri="{FF2B5EF4-FFF2-40B4-BE49-F238E27FC236}">
+                <a16:creationId xmlns:a16="http://schemas.microsoft.com/office/drawing/2014/main" id="{F0639EB8-77BC-8360-2530-7CAE115DCFCC}"/>
+              </a:ext>
+            </a:extLst>
+          </p:cNvPr>
+          <p:cNvSpPr txBox="1">
+            <a:spLocks/>
+          </p:cNvSpPr>
+          <p:nvPr/>
+        </p:nvSpPr>
+        <p:spPr>
+          <a:xfrm>
+            <a:off x="567185" y="588200"/>
+            <a:ext cx="10515600" cy="1325563"/>
+          </a:xfrm>
+          <a:prstGeom prst="rect">
+            <a:avLst/>
+          </a:prstGeom>
+        </p:spPr>
+        <p:txBody>
+          <a:bodyPr vert="horz" lIns="91440" tIns="45720" rIns="91440" bIns="45720" rtlCol="0" anchor="ctr">
+            <a:normAutofit/>
+          </a:bodyPr>
+          <a:lstStyle>
+            <a:lvl1pPr algn="l" defTabSz="914400" rtl="0" eaLnBrk="1" latinLnBrk="0" hangingPunct="1">
+              <a:lnSpc>
+                <a:spcPct val="90000"/>
+              </a:lnSpc>
+              <a:spcBef>
+                <a:spcPct val="0"/>
+              </a:spcBef>
+              <a:buNone/>
+              <a:defRPr sz="4400" kern="1200">
+                <a:solidFill>
+                  <a:schemeClr val="tx1"/>
+                </a:solidFill>
+                <a:latin typeface="+mj-lt"/>
+                <a:ea typeface="+mj-ea"/>
+                <a:cs typeface="+mj-cs"/>
+              </a:defRPr>
+            </a:lvl1pPr>
+          </a:lstStyle>
+          <a:p>
+            <a:r>
+              <a:rPr lang="en-US" dirty="0"/>
+              <a:t>Erosion/Dilation</a:t>
+            </a:r>
+          </a:p>
+        </p:txBody>
+      </p:sp>
     </p:spTree>
     <p:extLst>
       <p:ext uri="{BB962C8B-B14F-4D97-AF65-F5344CB8AC3E}">
@@ -13449,7 +13704,7 @@
 </p:sld>
 </file>
 
-<file path=ppt/slides/slide14.xml><?xml version="1.0" encoding="utf-8"?>
+<file path=ppt/slides/slide15.xml><?xml version="1.0" encoding="utf-8"?>
 <p:sld xmlns:a="http://schemas.openxmlformats.org/drawingml/2006/main" xmlns:r="http://schemas.openxmlformats.org/officeDocument/2006/relationships" xmlns:p="http://schemas.openxmlformats.org/presentationml/2006/main">
   <p:cSld>
     <p:spTree>
@@ -14466,7 +14721,7 @@
 </p:sld>
 </file>
 
-<file path=ppt/slides/slide15.xml><?xml version="1.0" encoding="utf-8"?>
+<file path=ppt/slides/slide16.xml><?xml version="1.0" encoding="utf-8"?>
 <p:sld xmlns:a="http://schemas.openxmlformats.org/drawingml/2006/main" xmlns:r="http://schemas.openxmlformats.org/officeDocument/2006/relationships" xmlns:p="http://schemas.openxmlformats.org/presentationml/2006/main">
   <p:cSld>
     <p:spTree>
@@ -15992,7 +16247,7 @@
 </p:sld>
 </file>
 
-<file path=ppt/slides/slide16.xml><?xml version="1.0" encoding="utf-8"?>
+<file path=ppt/slides/slide17.xml><?xml version="1.0" encoding="utf-8"?>
 <p:sld xmlns:a="http://schemas.openxmlformats.org/drawingml/2006/main" xmlns:r="http://schemas.openxmlformats.org/officeDocument/2006/relationships" xmlns:p="http://schemas.openxmlformats.org/presentationml/2006/main">
   <p:cSld>
     <p:spTree>
@@ -16939,7 +17194,7 @@
 </p:sld>
 </file>
 
-<file path=ppt/slides/slide17.xml><?xml version="1.0" encoding="utf-8"?>
+<file path=ppt/slides/slide18.xml><?xml version="1.0" encoding="utf-8"?>
 <p:sld xmlns:a="http://schemas.openxmlformats.org/drawingml/2006/main" xmlns:r="http://schemas.openxmlformats.org/officeDocument/2006/relationships" xmlns:p="http://schemas.openxmlformats.org/presentationml/2006/main">
   <p:cSld>
     <p:spTree>
@@ -17025,6 +17280,61 @@
           </a:ln>
         </p:spPr>
       </p:pic>
+      <p:sp>
+        <p:nvSpPr>
+          <p:cNvPr id="3" name="TextBox 2">
+            <a:extLst>
+              <a:ext uri="{FF2B5EF4-FFF2-40B4-BE49-F238E27FC236}">
+                <a16:creationId xmlns:a16="http://schemas.microsoft.com/office/drawing/2014/main" id="{DD674F2D-1D4C-205A-BE57-EF6C1B2648DA}"/>
+              </a:ext>
+            </a:extLst>
+          </p:cNvPr>
+          <p:cNvSpPr txBox="1"/>
+          <p:nvPr/>
+        </p:nvSpPr>
+        <p:spPr>
+          <a:xfrm>
+            <a:off x="3744686" y="1690688"/>
+            <a:ext cx="6963573" cy="369332"/>
+          </a:xfrm>
+          <a:prstGeom prst="rect">
+            <a:avLst/>
+          </a:prstGeom>
+          <a:noFill/>
+        </p:spPr>
+        <p:txBody>
+          <a:bodyPr wrap="none" rtlCol="0">
+            <a:spAutoFit/>
+          </a:bodyPr>
+          <a:lstStyle/>
+          <a:p>
+            <a:r>
+              <a:rPr lang="en-US" dirty="0" err="1"/>
+              <a:t>thres</a:t>
+            </a:r>
+            <a:r>
+              <a:rPr lang="en-US" dirty="0"/>
+              <a:t>, </a:t>
+            </a:r>
+            <a:r>
+              <a:rPr lang="en-US" dirty="0" err="1"/>
+              <a:t>img_out</a:t>
+            </a:r>
+            <a:r>
+              <a:rPr lang="en-US" dirty="0"/>
+              <a:t> = cv2.threshold(</a:t>
+            </a:r>
+            <a:r>
+              <a:rPr lang="en-US" dirty="0" err="1"/>
+              <a:t>img</a:t>
+            </a:r>
+            <a:r>
+              <a:rPr lang="en-US" dirty="0"/>
+              <a:t>, thresh, replacement value, type) </a:t>
+            </a:r>
+          </a:p>
+        </p:txBody>
+      </p:sp>
     </p:spTree>
     <p:extLst>
       <p:ext uri="{BB962C8B-B14F-4D97-AF65-F5344CB8AC3E}">
@@ -17038,7 +17348,7 @@
 </p:sld>
 </file>
 
-<file path=ppt/slides/slide18.xml><?xml version="1.0" encoding="utf-8"?>
+<file path=ppt/slides/slide19.xml><?xml version="1.0" encoding="utf-8"?>
 <p:sld xmlns:a="http://schemas.openxmlformats.org/drawingml/2006/main" xmlns:r="http://schemas.openxmlformats.org/officeDocument/2006/relationships" xmlns:p="http://schemas.openxmlformats.org/presentationml/2006/main">
   <p:cSld>
     <p:spTree>
@@ -17208,8 +17518,8 @@
           </a:prstGeom>
         </p:spPr>
       </p:pic>
-      <mc:AlternateContent xmlns:mc="http://schemas.openxmlformats.org/markup-compatibility/2006">
-        <mc:Choice xmlns:a14="http://schemas.microsoft.com/office/drawing/2010/main" Requires="a14">
+      <mc:AlternateContent xmlns:mc="http://schemas.openxmlformats.org/markup-compatibility/2006" xmlns:a14="http://schemas.microsoft.com/office/drawing/2010/main">
+        <mc:Choice Requires="a14">
           <p:sp>
             <p:nvSpPr>
               <p:cNvPr id="6" name="TextBox 5">
@@ -17238,6 +17548,7 @@
               </a:bodyPr>
               <a:lstStyle/>
               <a:p>
+                <a:pPr/>
                 <a14:m>
                   <m:oMathPara xmlns:m="http://schemas.openxmlformats.org/officeDocument/2006/math">
                     <m:oMathParaPr>
@@ -17453,7 +17764,7 @@
             </p:txBody>
           </p:sp>
         </mc:Choice>
-        <mc:Fallback>
+        <mc:Fallback xmlns="">
           <p:sp>
             <p:nvSpPr>
               <p:cNvPr id="6" name="TextBox 5">
@@ -17805,102 +18116,6 @@
     <p:extLst>
       <p:ext uri="{BB962C8B-B14F-4D97-AF65-F5344CB8AC3E}">
         <p14:creationId xmlns:p14="http://schemas.microsoft.com/office/powerpoint/2010/main" val="3854837005"/>
-      </p:ext>
-    </p:extLst>
-  </p:cSld>
-  <p:clrMapOvr>
-    <a:masterClrMapping/>
-  </p:clrMapOvr>
-</p:sld>
-</file>
-
-<file path=ppt/slides/slide19.xml><?xml version="1.0" encoding="utf-8"?>
-<p:sld xmlns:a="http://schemas.openxmlformats.org/drawingml/2006/main" xmlns:r="http://schemas.openxmlformats.org/officeDocument/2006/relationships" xmlns:p="http://schemas.openxmlformats.org/presentationml/2006/main">
-  <p:cSld>
-    <p:spTree>
-      <p:nvGrpSpPr>
-        <p:cNvPr id="1" name=""/>
-        <p:cNvGrpSpPr/>
-        <p:nvPr/>
-      </p:nvGrpSpPr>
-      <p:grpSpPr>
-        <a:xfrm>
-          <a:off x="0" y="0"/>
-          <a:ext cx="0" cy="0"/>
-          <a:chOff x="0" y="0"/>
-          <a:chExt cx="0" cy="0"/>
-        </a:xfrm>
-      </p:grpSpPr>
-      <p:sp>
-        <p:nvSpPr>
-          <p:cNvPr id="2" name="Title 1">
-            <a:extLst>
-              <a:ext uri="{FF2B5EF4-FFF2-40B4-BE49-F238E27FC236}">
-                <a16:creationId xmlns:a16="http://schemas.microsoft.com/office/drawing/2014/main" id="{38B549D3-9F67-F3BC-68A7-BB9BF5013E10}"/>
-              </a:ext>
-            </a:extLst>
-          </p:cNvPr>
-          <p:cNvSpPr>
-            <a:spLocks noGrp="1"/>
-          </p:cNvSpPr>
-          <p:nvPr>
-            <p:ph type="title"/>
-          </p:nvPr>
-        </p:nvSpPr>
-        <p:spPr/>
-        <p:txBody>
-          <a:bodyPr/>
-          <a:lstStyle/>
-          <a:p>
-            <a:endParaRPr lang="en-US"/>
-          </a:p>
-        </p:txBody>
-      </p:sp>
-      <p:pic>
-        <p:nvPicPr>
-          <p:cNvPr id="4" name="Picture 3" descr="A collage of images of music notes&#10;&#10;Description automatically generated">
-            <a:extLst>
-              <a:ext uri="{FF2B5EF4-FFF2-40B4-BE49-F238E27FC236}">
-                <a16:creationId xmlns:a16="http://schemas.microsoft.com/office/drawing/2014/main" id="{8E695790-D8DF-DF85-7ABB-BAE9FDCDD5A5}"/>
-              </a:ext>
-            </a:extLst>
-          </p:cNvPr>
-          <p:cNvPicPr>
-            <a:picLocks noChangeAspect="1"/>
-          </p:cNvPicPr>
-          <p:nvPr/>
-        </p:nvPicPr>
-        <p:blipFill>
-          <a:blip r:embed="rId2" cstate="print">
-            <a:extLst>
-              <a:ext uri="{28A0092B-C50C-407E-A947-70E740481C1C}">
-                <a14:useLocalDpi xmlns:a14="http://schemas.microsoft.com/office/drawing/2010/main" val="0"/>
-              </a:ext>
-            </a:extLst>
-          </a:blip>
-          <a:srcRect/>
-          <a:stretch>
-            <a:fillRect/>
-          </a:stretch>
-        </p:blipFill>
-        <p:spPr bwMode="auto">
-          <a:xfrm>
-            <a:off x="315686" y="1873976"/>
-            <a:ext cx="5943600" cy="4808220"/>
-          </a:xfrm>
-          <a:prstGeom prst="rect">
-            <a:avLst/>
-          </a:prstGeom>
-          <a:noFill/>
-          <a:ln>
-            <a:noFill/>
-          </a:ln>
-        </p:spPr>
-      </p:pic>
-    </p:spTree>
-    <p:extLst>
-      <p:ext uri="{BB962C8B-B14F-4D97-AF65-F5344CB8AC3E}">
-        <p14:creationId xmlns:p14="http://schemas.microsoft.com/office/powerpoint/2010/main" val="2776231912"/>
       </p:ext>
     </p:extLst>
   </p:cSld>
@@ -18714,7 +18929,7 @@
         </p:nvSpPr>
         <p:spPr>
           <a:xfrm>
-            <a:off x="4881962" y="2298778"/>
+            <a:off x="4642476" y="1254953"/>
             <a:ext cx="2577757" cy="369332"/>
           </a:xfrm>
           <a:prstGeom prst="rect">
@@ -18831,8 +19046,8 @@
           </p:sp>
         </mc:Fallback>
       </mc:AlternateContent>
-      <mc:AlternateContent xmlns:mc="http://schemas.openxmlformats.org/markup-compatibility/2006" xmlns:a14="http://schemas.microsoft.com/office/drawing/2010/main">
-        <mc:Choice Requires="a14">
+      <mc:AlternateContent xmlns:mc="http://schemas.openxmlformats.org/markup-compatibility/2006">
+        <mc:Choice xmlns:a14="http://schemas.microsoft.com/office/drawing/2010/main" Requires="a14">
           <p:sp>
             <p:nvSpPr>
               <p:cNvPr id="6" name="TextBox 5">
@@ -18847,7 +19062,7 @@
             </p:nvSpPr>
             <p:spPr>
               <a:xfrm>
-                <a:off x="6096000" y="2655535"/>
+                <a:off x="5856514" y="1611710"/>
                 <a:ext cx="2433038" cy="677108"/>
               </a:xfrm>
               <a:prstGeom prst="rect">
@@ -18906,7 +19121,7 @@
             </p:txBody>
           </p:sp>
         </mc:Choice>
-        <mc:Fallback xmlns="">
+        <mc:Fallback>
           <p:sp>
             <p:nvSpPr>
               <p:cNvPr id="6" name="TextBox 5">
@@ -18923,7 +19138,7 @@
             </p:nvSpPr>
             <p:spPr>
               <a:xfrm>
-                <a:off x="6096000" y="2655535"/>
+                <a:off x="5856514" y="1611710"/>
                 <a:ext cx="2433038" cy="677108"/>
               </a:xfrm>
               <a:prstGeom prst="rect">
@@ -18932,7 +19147,7 @@
               <a:blipFill>
                 <a:blip r:embed="rId3"/>
                 <a:stretch>
-                  <a:fillRect l="-5208" r="-4167" b="-3704"/>
+                  <a:fillRect l="-5208" r="-4167" b="-5556"/>
                 </a:stretch>
               </a:blipFill>
             </p:spPr>
@@ -18951,8 +19166,8 @@
           </p:sp>
         </mc:Fallback>
       </mc:AlternateContent>
-      <mc:AlternateContent xmlns:mc="http://schemas.openxmlformats.org/markup-compatibility/2006" xmlns:a14="http://schemas.microsoft.com/office/drawing/2010/main">
-        <mc:Choice Requires="a14">
+      <mc:AlternateContent xmlns:mc="http://schemas.openxmlformats.org/markup-compatibility/2006">
+        <mc:Choice xmlns:a14="http://schemas.microsoft.com/office/drawing/2010/main" Requires="a14">
           <p:sp>
             <p:nvSpPr>
               <p:cNvPr id="8" name="TextBox 7">
@@ -18967,8 +19182,8 @@
             </p:nvSpPr>
             <p:spPr>
               <a:xfrm>
-                <a:off x="6014270" y="3332643"/>
-                <a:ext cx="2953886" cy="677108"/>
+                <a:off x="5774784" y="2288818"/>
+                <a:ext cx="2694199" cy="677108"/>
               </a:xfrm>
               <a:prstGeom prst="rect">
                 <a:avLst/>
@@ -19004,7 +19219,7 @@
                         <a:rPr lang="en-US" sz="4400" b="0" i="1" smtClean="0">
                           <a:latin typeface="Cambria Math" panose="02040503050406030204" pitchFamily="18" charset="0"/>
                         </a:rPr>
-                        <m:t>𝑓𝑐𝑛</m:t>
+                        <m:t>𝑓𝑛</m:t>
                       </m:r>
                       <m:r>
                         <a:rPr lang="en-US" sz="4400" b="0" i="1" smtClean="0">
@@ -19032,7 +19247,7 @@
             </p:txBody>
           </p:sp>
         </mc:Choice>
-        <mc:Fallback xmlns="">
+        <mc:Fallback>
           <p:sp>
             <p:nvSpPr>
               <p:cNvPr id="8" name="TextBox 7">
@@ -19049,8 +19264,8 @@
             </p:nvSpPr>
             <p:spPr>
               <a:xfrm>
-                <a:off x="6014270" y="3332643"/>
-                <a:ext cx="2953886" cy="677108"/>
+                <a:off x="5774784" y="2288818"/>
+                <a:ext cx="2694199" cy="677108"/>
               </a:xfrm>
               <a:prstGeom prst="rect">
                 <a:avLst/>
@@ -19058,7 +19273,7 @@
               <a:blipFill>
                 <a:blip r:embed="rId4"/>
                 <a:stretch>
-                  <a:fillRect l="-3846" r="-6410" b="-35185"/>
+                  <a:fillRect l="-4225" t="-1852" r="-7512" b="-35185"/>
                 </a:stretch>
               </a:blipFill>
             </p:spPr>
@@ -19077,8 +19292,8 @@
           </p:sp>
         </mc:Fallback>
       </mc:AlternateContent>
-      <mc:AlternateContent xmlns:mc="http://schemas.openxmlformats.org/markup-compatibility/2006" xmlns:a14="http://schemas.microsoft.com/office/drawing/2010/main">
-        <mc:Choice Requires="a14">
+      <mc:AlternateContent xmlns:mc="http://schemas.openxmlformats.org/markup-compatibility/2006">
+        <mc:Choice xmlns:a14="http://schemas.microsoft.com/office/drawing/2010/main" Requires="a14">
           <p:sp>
             <p:nvSpPr>
               <p:cNvPr id="9" name="TextBox 8">
@@ -19093,7 +19308,7 @@
             </p:nvSpPr>
             <p:spPr>
               <a:xfrm>
-                <a:off x="6014270" y="4048619"/>
+                <a:off x="5774784" y="3004794"/>
                 <a:ext cx="3611566" cy="677108"/>
               </a:xfrm>
               <a:prstGeom prst="rect">
@@ -19170,7 +19385,7 @@
             </p:txBody>
           </p:sp>
         </mc:Choice>
-        <mc:Fallback xmlns="">
+        <mc:Fallback>
           <p:sp>
             <p:nvSpPr>
               <p:cNvPr id="9" name="TextBox 8">
@@ -19187,7 +19402,7 @@
             </p:nvSpPr>
             <p:spPr>
               <a:xfrm>
-                <a:off x="6014270" y="4048619"/>
+                <a:off x="5774784" y="3004794"/>
                 <a:ext cx="3611566" cy="677108"/>
               </a:xfrm>
               <a:prstGeom prst="rect">
@@ -19196,7 +19411,7 @@
               <a:blipFill>
                 <a:blip r:embed="rId5"/>
                 <a:stretch>
-                  <a:fillRect l="-3158" t="-1852" r="-4211" b="-9259"/>
+                  <a:fillRect l="-3147" t="-3704" r="-3846" b="-9259"/>
                 </a:stretch>
               </a:blipFill>
             </p:spPr>
@@ -19229,7 +19444,7 @@
         </p:nvSpPr>
         <p:spPr>
           <a:xfrm>
-            <a:off x="4994690" y="4907736"/>
+            <a:off x="4716321" y="3752511"/>
             <a:ext cx="2864246" cy="369332"/>
           </a:xfrm>
           <a:prstGeom prst="rect">
@@ -19264,8 +19479,8 @@
         </p:nvSpPr>
         <p:spPr>
           <a:xfrm>
-            <a:off x="6426815" y="5341682"/>
-            <a:ext cx="3146882" cy="923330"/>
+            <a:off x="6788570" y="5094152"/>
+            <a:ext cx="4332669" cy="1569660"/>
           </a:xfrm>
           <a:prstGeom prst="rect">
             <a:avLst/>
@@ -19279,44 +19494,79 @@
           <a:lstStyle/>
           <a:p>
             <a:r>
-              <a:rPr lang="en-US" dirty="0"/>
+              <a:rPr lang="en-US" sz="3200" dirty="0"/>
               <a:t>For (</a:t>
             </a:r>
             <a:r>
-              <a:rPr lang="en-US" dirty="0" err="1"/>
+              <a:rPr lang="en-US" sz="3200" dirty="0" err="1"/>
               <a:t>i</a:t>
             </a:r>
             <a:r>
-              <a:rPr lang="en-US" dirty="0"/>
+              <a:rPr lang="en-US" sz="3200" dirty="0"/>
               <a:t>=0; </a:t>
             </a:r>
             <a:r>
-              <a:rPr lang="en-US" dirty="0" err="1"/>
+              <a:rPr lang="en-US" sz="3200" dirty="0" err="1"/>
               <a:t>i</a:t>
             </a:r>
             <a:r>
-              <a:rPr lang="en-US" dirty="0"/>
+              <a:rPr lang="en-US" sz="3200" dirty="0"/>
               <a:t>&lt;n; </a:t>
             </a:r>
             <a:r>
-              <a:rPr lang="en-US" dirty="0" err="1"/>
+              <a:rPr lang="en-US" sz="3200" dirty="0" err="1"/>
               <a:t>i</a:t>
             </a:r>
             <a:r>
-              <a:rPr lang="en-US" dirty="0"/>
+              <a:rPr lang="en-US" sz="3200" dirty="0"/>
               <a:t>++)</a:t>
             </a:r>
           </a:p>
           <a:p>
             <a:r>
-              <a:rPr lang="en-US" dirty="0"/>
+              <a:rPr lang="en-US" sz="3200" dirty="0"/>
               <a:t>	do something</a:t>
             </a:r>
           </a:p>
           <a:p>
             <a:r>
-              <a:rPr lang="en-US" dirty="0"/>
+              <a:rPr lang="en-US" sz="3200" dirty="0"/>
               <a:t>end</a:t>
+            </a:r>
+          </a:p>
+        </p:txBody>
+      </p:sp>
+      <p:sp>
+        <p:nvSpPr>
+          <p:cNvPr id="12" name="TextBox 11">
+            <a:extLst>
+              <a:ext uri="{FF2B5EF4-FFF2-40B4-BE49-F238E27FC236}">
+                <a16:creationId xmlns:a16="http://schemas.microsoft.com/office/drawing/2014/main" id="{5CFBFC58-FEB9-0117-BBF1-1EC8B73256D2}"/>
+              </a:ext>
+            </a:extLst>
+          </p:cNvPr>
+          <p:cNvSpPr txBox="1"/>
+          <p:nvPr/>
+        </p:nvSpPr>
+        <p:spPr>
+          <a:xfrm>
+            <a:off x="5856514" y="4192452"/>
+            <a:ext cx="4728789" cy="769441"/>
+          </a:xfrm>
+          <a:prstGeom prst="rect">
+            <a:avLst/>
+          </a:prstGeom>
+          <a:noFill/>
+        </p:spPr>
+        <p:txBody>
+          <a:bodyPr wrap="square" rtlCol="0">
+            <a:spAutoFit/>
+          </a:bodyPr>
+          <a:lstStyle/>
+          <a:p>
+            <a:r>
+              <a:rPr lang="en-US" sz="4400" dirty="0"/>
+              <a:t>E.g. Dilate/Erode</a:t>
             </a:r>
           </a:p>
         </p:txBody>
@@ -19335,6 +19585,110 @@
 </file>
 
 <file path=ppt/slides/slide20.xml><?xml version="1.0" encoding="utf-8"?>
+<p:sld xmlns:a="http://schemas.openxmlformats.org/drawingml/2006/main" xmlns:r="http://schemas.openxmlformats.org/officeDocument/2006/relationships" xmlns:p="http://schemas.openxmlformats.org/presentationml/2006/main">
+  <p:cSld>
+    <p:spTree>
+      <p:nvGrpSpPr>
+        <p:cNvPr id="1" name=""/>
+        <p:cNvGrpSpPr/>
+        <p:nvPr/>
+      </p:nvGrpSpPr>
+      <p:grpSpPr>
+        <a:xfrm>
+          <a:off x="0" y="0"/>
+          <a:ext cx="0" cy="0"/>
+          <a:chOff x="0" y="0"/>
+          <a:chExt cx="0" cy="0"/>
+        </a:xfrm>
+      </p:grpSpPr>
+      <p:pic>
+        <p:nvPicPr>
+          <p:cNvPr id="4" name="Picture 3" descr="A collage of images of music notes&#10;&#10;Description automatically generated">
+            <a:extLst>
+              <a:ext uri="{FF2B5EF4-FFF2-40B4-BE49-F238E27FC236}">
+                <a16:creationId xmlns:a16="http://schemas.microsoft.com/office/drawing/2014/main" id="{8E695790-D8DF-DF85-7ABB-BAE9FDCDD5A5}"/>
+              </a:ext>
+            </a:extLst>
+          </p:cNvPr>
+          <p:cNvPicPr>
+            <a:picLocks noChangeAspect="1"/>
+          </p:cNvPicPr>
+          <p:nvPr/>
+        </p:nvPicPr>
+        <p:blipFill>
+          <a:blip r:embed="rId2" cstate="print">
+            <a:extLst>
+              <a:ext uri="{28A0092B-C50C-407E-A947-70E740481C1C}">
+                <a14:useLocalDpi xmlns:a14="http://schemas.microsoft.com/office/drawing/2010/main" val="0"/>
+              </a:ext>
+            </a:extLst>
+          </a:blip>
+          <a:srcRect/>
+          <a:stretch>
+            <a:fillRect/>
+          </a:stretch>
+        </p:blipFill>
+        <p:spPr bwMode="auto">
+          <a:xfrm>
+            <a:off x="3777343" y="1284513"/>
+            <a:ext cx="7837714" cy="5462997"/>
+          </a:xfrm>
+          <a:prstGeom prst="rect">
+            <a:avLst/>
+          </a:prstGeom>
+          <a:noFill/>
+          <a:ln>
+            <a:noFill/>
+          </a:ln>
+        </p:spPr>
+      </p:pic>
+      <p:sp>
+        <p:nvSpPr>
+          <p:cNvPr id="3" name="Title 1">
+            <a:extLst>
+              <a:ext uri="{FF2B5EF4-FFF2-40B4-BE49-F238E27FC236}">
+                <a16:creationId xmlns:a16="http://schemas.microsoft.com/office/drawing/2014/main" id="{CCCE8A8C-0086-8BDB-29B6-74CA22FEE5DE}"/>
+              </a:ext>
+            </a:extLst>
+          </p:cNvPr>
+          <p:cNvSpPr>
+            <a:spLocks noGrp="1"/>
+          </p:cNvSpPr>
+          <p:nvPr>
+            <p:ph type="title"/>
+          </p:nvPr>
+        </p:nvSpPr>
+        <p:spPr>
+          <a:xfrm>
+            <a:off x="313544" y="245204"/>
+            <a:ext cx="10515600" cy="1325563"/>
+          </a:xfrm>
+        </p:spPr>
+        <p:txBody>
+          <a:bodyPr/>
+          <a:lstStyle/>
+          <a:p>
+            <a:r>
+              <a:rPr lang="en-US" dirty="0"/>
+              <a:t>Adaptive thresholding</a:t>
+            </a:r>
+          </a:p>
+        </p:txBody>
+      </p:sp>
+    </p:spTree>
+    <p:extLst>
+      <p:ext uri="{BB962C8B-B14F-4D97-AF65-F5344CB8AC3E}">
+        <p14:creationId xmlns:p14="http://schemas.microsoft.com/office/powerpoint/2010/main" val="2776231912"/>
+      </p:ext>
+    </p:extLst>
+  </p:cSld>
+  <p:clrMapOvr>
+    <a:masterClrMapping/>
+  </p:clrMapOvr>
+</p:sld>
+</file>
+
+<file path=ppt/slides/slide21.xml><?xml version="1.0" encoding="utf-8"?>
 <p:sld xmlns:a="http://schemas.openxmlformats.org/drawingml/2006/main" xmlns:r="http://schemas.openxmlformats.org/officeDocument/2006/relationships" xmlns:p="http://schemas.openxmlformats.org/presentationml/2006/main">
   <p:cSld>
     <p:spTree>
@@ -21040,8 +21394,8 @@
           </p:style>
         </p:cxnSp>
       </p:grpSp>
-      <mc:AlternateContent xmlns:mc="http://schemas.openxmlformats.org/markup-compatibility/2006">
-        <mc:Choice xmlns:a14="http://schemas.microsoft.com/office/drawing/2010/main" Requires="a14">
+      <mc:AlternateContent xmlns:mc="http://schemas.openxmlformats.org/markup-compatibility/2006" xmlns:a14="http://schemas.microsoft.com/office/drawing/2010/main">
+        <mc:Choice Requires="a14">
           <p:sp>
             <p:nvSpPr>
               <p:cNvPr id="52" name="TextBox 51">
@@ -21267,7 +21621,7 @@
             </p:txBody>
           </p:sp>
         </mc:Choice>
-        <mc:Fallback>
+        <mc:Fallback xmlns="">
           <p:sp>
             <p:nvSpPr>
               <p:cNvPr id="52" name="TextBox 51">

--- a/ECE1390_Lecture2.pptx
+++ b/ECE1390_Lecture2.pptx
@@ -221,7 +221,7 @@
           <a:p>
             <a:fld id="{460182BA-D6B2-8C4C-A437-30BC8B3E8EFF}" type="datetimeFigureOut">
               <a:rPr lang="en-US" smtClean="0"/>
-              <a:t>8/24/24</a:t>
+              <a:t>8/28/24</a:t>
             </a:fld>
             <a:endParaRPr lang="en-US"/>
           </a:p>
@@ -719,7 +719,7 @@
           <a:p>
             <a:fld id="{13E9B49C-C8FD-4344-8CD3-ED4C91409D68}" type="datetimeFigureOut">
               <a:rPr lang="en-US" smtClean="0"/>
-              <a:t>8/24/24</a:t>
+              <a:t>8/28/24</a:t>
             </a:fld>
             <a:endParaRPr lang="en-US"/>
           </a:p>
@@ -917,7 +917,7 @@
           <a:p>
             <a:fld id="{13E9B49C-C8FD-4344-8CD3-ED4C91409D68}" type="datetimeFigureOut">
               <a:rPr lang="en-US" smtClean="0"/>
-              <a:t>8/24/24</a:t>
+              <a:t>8/28/24</a:t>
             </a:fld>
             <a:endParaRPr lang="en-US"/>
           </a:p>
@@ -1125,7 +1125,7 @@
           <a:p>
             <a:fld id="{13E9B49C-C8FD-4344-8CD3-ED4C91409D68}" type="datetimeFigureOut">
               <a:rPr lang="en-US" smtClean="0"/>
-              <a:t>8/24/24</a:t>
+              <a:t>8/28/24</a:t>
             </a:fld>
             <a:endParaRPr lang="en-US"/>
           </a:p>
@@ -1323,7 +1323,7 @@
           <a:p>
             <a:fld id="{13E9B49C-C8FD-4344-8CD3-ED4C91409D68}" type="datetimeFigureOut">
               <a:rPr lang="en-US" smtClean="0"/>
-              <a:t>8/24/24</a:t>
+              <a:t>8/28/24</a:t>
             </a:fld>
             <a:endParaRPr lang="en-US"/>
           </a:p>
@@ -1598,7 +1598,7 @@
           <a:p>
             <a:fld id="{13E9B49C-C8FD-4344-8CD3-ED4C91409D68}" type="datetimeFigureOut">
               <a:rPr lang="en-US" smtClean="0"/>
-              <a:t>8/24/24</a:t>
+              <a:t>8/28/24</a:t>
             </a:fld>
             <a:endParaRPr lang="en-US"/>
           </a:p>
@@ -1863,7 +1863,7 @@
           <a:p>
             <a:fld id="{13E9B49C-C8FD-4344-8CD3-ED4C91409D68}" type="datetimeFigureOut">
               <a:rPr lang="en-US" smtClean="0"/>
-              <a:t>8/24/24</a:t>
+              <a:t>8/28/24</a:t>
             </a:fld>
             <a:endParaRPr lang="en-US"/>
           </a:p>
@@ -2275,7 +2275,7 @@
           <a:p>
             <a:fld id="{13E9B49C-C8FD-4344-8CD3-ED4C91409D68}" type="datetimeFigureOut">
               <a:rPr lang="en-US" smtClean="0"/>
-              <a:t>8/24/24</a:t>
+              <a:t>8/28/24</a:t>
             </a:fld>
             <a:endParaRPr lang="en-US"/>
           </a:p>
@@ -2416,7 +2416,7 @@
           <a:p>
             <a:fld id="{13E9B49C-C8FD-4344-8CD3-ED4C91409D68}" type="datetimeFigureOut">
               <a:rPr lang="en-US" smtClean="0"/>
-              <a:t>8/24/24</a:t>
+              <a:t>8/28/24</a:t>
             </a:fld>
             <a:endParaRPr lang="en-US"/>
           </a:p>
@@ -2529,7 +2529,7 @@
           <a:p>
             <a:fld id="{13E9B49C-C8FD-4344-8CD3-ED4C91409D68}" type="datetimeFigureOut">
               <a:rPr lang="en-US" smtClean="0"/>
-              <a:t>8/24/24</a:t>
+              <a:t>8/28/24</a:t>
             </a:fld>
             <a:endParaRPr lang="en-US"/>
           </a:p>
@@ -2840,7 +2840,7 @@
           <a:p>
             <a:fld id="{13E9B49C-C8FD-4344-8CD3-ED4C91409D68}" type="datetimeFigureOut">
               <a:rPr lang="en-US" smtClean="0"/>
-              <a:t>8/24/24</a:t>
+              <a:t>8/28/24</a:t>
             </a:fld>
             <a:endParaRPr lang="en-US"/>
           </a:p>
@@ -3128,7 +3128,7 @@
           <a:p>
             <a:fld id="{13E9B49C-C8FD-4344-8CD3-ED4C91409D68}" type="datetimeFigureOut">
               <a:rPr lang="en-US" smtClean="0"/>
-              <a:t>8/24/24</a:t>
+              <a:t>8/28/24</a:t>
             </a:fld>
             <a:endParaRPr lang="en-US"/>
           </a:p>
@@ -3369,7 +3369,7 @@
           <a:p>
             <a:fld id="{13E9B49C-C8FD-4344-8CD3-ED4C91409D68}" type="datetimeFigureOut">
               <a:rPr lang="en-US" smtClean="0"/>
-              <a:t>8/24/24</a:t>
+              <a:t>8/28/24</a:t>
             </a:fld>
             <a:endParaRPr lang="en-US"/>
           </a:p>
@@ -4249,8 +4249,8 @@
           <a:chExt cx="0" cy="0"/>
         </a:xfrm>
       </p:grpSpPr>
-      <mc:AlternateContent xmlns:mc="http://schemas.openxmlformats.org/markup-compatibility/2006">
-        <mc:Choice xmlns:a14="http://schemas.microsoft.com/office/drawing/2010/main" Requires="a14">
+      <mc:AlternateContent xmlns:mc="http://schemas.openxmlformats.org/markup-compatibility/2006" xmlns:a14="http://schemas.microsoft.com/office/drawing/2010/main">
+        <mc:Choice Requires="a14">
           <p:sp>
             <p:nvSpPr>
               <p:cNvPr id="4" name="TextBox 3">
@@ -4342,7 +4342,7 @@
             </p:txBody>
           </p:sp>
         </mc:Choice>
-        <mc:Fallback>
+        <mc:Fallback xmlns="">
           <p:sp>
             <p:nvSpPr>
               <p:cNvPr id="4" name="TextBox 3">
@@ -5125,8 +5125,8 @@
           </p:cxnSp>
         </p:grpSp>
       </p:grpSp>
-      <mc:AlternateContent xmlns:mc="http://schemas.openxmlformats.org/markup-compatibility/2006">
-        <mc:Choice xmlns:a14="http://schemas.microsoft.com/office/drawing/2010/main" Requires="a14">
+      <mc:AlternateContent xmlns:mc="http://schemas.openxmlformats.org/markup-compatibility/2006" xmlns:a14="http://schemas.microsoft.com/office/drawing/2010/main">
+        <mc:Choice Requires="a14">
           <p:sp>
             <p:nvSpPr>
               <p:cNvPr id="23" name="TextBox 22">
@@ -5188,7 +5188,7 @@
             </p:txBody>
           </p:sp>
         </mc:Choice>
-        <mc:Fallback>
+        <mc:Fallback xmlns="">
           <p:sp>
             <p:nvSpPr>
               <p:cNvPr id="23" name="TextBox 22">
@@ -5325,8 +5325,8 @@
           </a:p>
         </p:txBody>
       </p:sp>
-      <mc:AlternateContent xmlns:mc="http://schemas.openxmlformats.org/markup-compatibility/2006">
-        <mc:Choice xmlns:a14="http://schemas.microsoft.com/office/drawing/2010/main" Requires="a14">
+      <mc:AlternateContent xmlns:mc="http://schemas.openxmlformats.org/markup-compatibility/2006" xmlns:a14="http://schemas.microsoft.com/office/drawing/2010/main">
+        <mc:Choice Requires="a14">
           <p:sp>
             <p:nvSpPr>
               <p:cNvPr id="26" name="TextBox 25">
@@ -5394,7 +5394,7 @@
             </p:txBody>
           </p:sp>
         </mc:Choice>
-        <mc:Fallback>
+        <mc:Fallback xmlns="">
           <p:sp>
             <p:nvSpPr>
               <p:cNvPr id="26" name="TextBox 25">
@@ -5591,8 +5591,8 @@
           </a:p>
         </p:txBody>
       </p:sp>
-      <mc:AlternateContent xmlns:mc="http://schemas.openxmlformats.org/markup-compatibility/2006">
-        <mc:Choice xmlns:a14="http://schemas.microsoft.com/office/drawing/2010/main" Requires="a14">
+      <mc:AlternateContent xmlns:mc="http://schemas.openxmlformats.org/markup-compatibility/2006" xmlns:a14="http://schemas.microsoft.com/office/drawing/2010/main">
+        <mc:Choice Requires="a14">
           <p:sp>
             <p:nvSpPr>
               <p:cNvPr id="4" name="TextBox 3">
@@ -5734,7 +5734,7 @@
             </p:txBody>
           </p:sp>
         </mc:Choice>
-        <mc:Fallback>
+        <mc:Fallback xmlns="">
           <p:sp>
             <p:nvSpPr>
               <p:cNvPr id="4" name="TextBox 3">
@@ -5779,8 +5779,8 @@
           </p:sp>
         </mc:Fallback>
       </mc:AlternateContent>
-      <mc:AlternateContent xmlns:mc="http://schemas.openxmlformats.org/markup-compatibility/2006">
-        <mc:Choice xmlns:a14="http://schemas.microsoft.com/office/drawing/2010/main" Requires="a14">
+      <mc:AlternateContent xmlns:mc="http://schemas.openxmlformats.org/markup-compatibility/2006" xmlns:a14="http://schemas.microsoft.com/office/drawing/2010/main">
+        <mc:Choice Requires="a14">
           <p:sp>
             <p:nvSpPr>
               <p:cNvPr id="5" name="TextBox 4">
@@ -5969,7 +5969,7 @@
             </p:txBody>
           </p:sp>
         </mc:Choice>
-        <mc:Fallback>
+        <mc:Fallback xmlns="">
           <p:sp>
             <p:nvSpPr>
               <p:cNvPr id="5" name="TextBox 4">
@@ -11708,8 +11708,8 @@
           </a:p>
         </p:txBody>
       </p:sp>
-      <mc:AlternateContent xmlns:mc="http://schemas.openxmlformats.org/markup-compatibility/2006">
-        <mc:Choice xmlns:a14="http://schemas.microsoft.com/office/drawing/2010/main" Requires="a14">
+      <mc:AlternateContent xmlns:mc="http://schemas.openxmlformats.org/markup-compatibility/2006" xmlns:a14="http://schemas.microsoft.com/office/drawing/2010/main">
+        <mc:Choice Requires="a14">
           <p:sp>
             <p:nvSpPr>
               <p:cNvPr id="3" name="TextBox 2">
@@ -11853,7 +11853,7 @@
             </p:txBody>
           </p:sp>
         </mc:Choice>
-        <mc:Fallback>
+        <mc:Fallback xmlns="">
           <p:sp>
             <p:nvSpPr>
               <p:cNvPr id="3" name="TextBox 2">
@@ -11898,8 +11898,8 @@
           </p:sp>
         </mc:Fallback>
       </mc:AlternateContent>
-      <mc:AlternateContent xmlns:mc="http://schemas.openxmlformats.org/markup-compatibility/2006">
-        <mc:Choice xmlns:a14="http://schemas.microsoft.com/office/drawing/2010/main" Requires="a14">
+      <mc:AlternateContent xmlns:mc="http://schemas.openxmlformats.org/markup-compatibility/2006" xmlns:a14="http://schemas.microsoft.com/office/drawing/2010/main">
+        <mc:Choice Requires="a14">
           <p:sp>
             <p:nvSpPr>
               <p:cNvPr id="4" name="TextBox 3">
@@ -11992,7 +11992,7 @@
             </p:txBody>
           </p:sp>
         </mc:Choice>
-        <mc:Fallback>
+        <mc:Fallback xmlns="">
           <p:sp>
             <p:nvSpPr>
               <p:cNvPr id="4" name="TextBox 3">
@@ -12107,8 +12107,8 @@
           </a:p>
         </p:txBody>
       </p:sp>
-      <mc:AlternateContent xmlns:mc="http://schemas.openxmlformats.org/markup-compatibility/2006">
-        <mc:Choice xmlns:a14="http://schemas.microsoft.com/office/drawing/2010/main" Requires="a14">
+      <mc:AlternateContent xmlns:mc="http://schemas.openxmlformats.org/markup-compatibility/2006" xmlns:a14="http://schemas.microsoft.com/office/drawing/2010/main">
+        <mc:Choice Requires="a14">
           <p:sp>
             <p:nvSpPr>
               <p:cNvPr id="8" name="TextBox 7">
@@ -12193,7 +12193,7 @@
             </p:txBody>
           </p:sp>
         </mc:Choice>
-        <mc:Fallback>
+        <mc:Fallback xmlns="">
           <p:sp>
             <p:nvSpPr>
               <p:cNvPr id="8" name="TextBox 7">
@@ -12353,8 +12353,8 @@
           </a:fontRef>
         </p:style>
       </p:cxnSp>
-      <mc:AlternateContent xmlns:mc="http://schemas.openxmlformats.org/markup-compatibility/2006">
-        <mc:Choice xmlns:a14="http://schemas.microsoft.com/office/drawing/2010/main" Requires="a14">
+      <mc:AlternateContent xmlns:mc="http://schemas.openxmlformats.org/markup-compatibility/2006" xmlns:a14="http://schemas.microsoft.com/office/drawing/2010/main">
+        <mc:Choice Requires="a14">
           <p:sp>
             <p:nvSpPr>
               <p:cNvPr id="13" name="TextBox 12">
@@ -12529,7 +12529,7 @@
             </p:txBody>
           </p:sp>
         </mc:Choice>
-        <mc:Fallback>
+        <mc:Fallback xmlns="">
           <p:sp>
             <p:nvSpPr>
               <p:cNvPr id="13" name="TextBox 12">
@@ -12874,8 +12874,8 @@
           </a:p>
         </p:txBody>
       </p:sp>
-      <mc:AlternateContent xmlns:mc="http://schemas.openxmlformats.org/markup-compatibility/2006">
-        <mc:Choice xmlns:a14="http://schemas.microsoft.com/office/drawing/2010/main" Requires="a14">
+      <mc:AlternateContent xmlns:mc="http://schemas.openxmlformats.org/markup-compatibility/2006" xmlns:a14="http://schemas.microsoft.com/office/drawing/2010/main">
+        <mc:Choice Requires="a14">
           <p:sp>
             <p:nvSpPr>
               <p:cNvPr id="4" name="TextBox 3">
@@ -12961,7 +12961,7 @@
             </p:txBody>
           </p:sp>
         </mc:Choice>
-        <mc:Fallback>
+        <mc:Fallback xmlns="">
           <p:sp>
             <p:nvSpPr>
               <p:cNvPr id="4" name="TextBox 3">
@@ -13006,8 +13006,8 @@
           </p:sp>
         </mc:Fallback>
       </mc:AlternateContent>
-      <mc:AlternateContent xmlns:mc="http://schemas.openxmlformats.org/markup-compatibility/2006">
-        <mc:Choice xmlns:a14="http://schemas.microsoft.com/office/drawing/2010/main" Requires="a14">
+      <mc:AlternateContent xmlns:mc="http://schemas.openxmlformats.org/markup-compatibility/2006" xmlns:a14="http://schemas.microsoft.com/office/drawing/2010/main">
+        <mc:Choice Requires="a14">
           <p:sp>
             <p:nvSpPr>
               <p:cNvPr id="9" name="TextBox 8">
@@ -13353,7 +13353,7 @@
             </p:txBody>
           </p:sp>
         </mc:Choice>
-        <mc:Fallback>
+        <mc:Fallback xmlns="">
           <p:sp>
             <p:nvSpPr>
               <p:cNvPr id="9" name="TextBox 8">
@@ -13398,8 +13398,8 @@
           </p:sp>
         </mc:Fallback>
       </mc:AlternateContent>
-      <mc:AlternateContent xmlns:mc="http://schemas.openxmlformats.org/markup-compatibility/2006">
-        <mc:Choice xmlns:a14="http://schemas.microsoft.com/office/drawing/2010/main" Requires="a14">
+      <mc:AlternateContent xmlns:mc="http://schemas.openxmlformats.org/markup-compatibility/2006" xmlns:a14="http://schemas.microsoft.com/office/drawing/2010/main">
+        <mc:Choice Requires="a14">
           <p:sp>
             <p:nvSpPr>
               <p:cNvPr id="10" name="TextBox 9">
@@ -13718,7 +13718,7 @@
             </p:txBody>
           </p:sp>
         </mc:Choice>
-        <mc:Fallback>
+        <mc:Fallback xmlns="">
           <p:sp>
             <p:nvSpPr>
               <p:cNvPr id="10" name="TextBox 9">
@@ -30914,8 +30914,8 @@
           </p:style>
         </p:cxnSp>
       </p:grpSp>
-      <mc:AlternateContent xmlns:mc="http://schemas.openxmlformats.org/markup-compatibility/2006">
-        <mc:Choice xmlns:a14="http://schemas.microsoft.com/office/drawing/2010/main" Requires="a14">
+      <mc:AlternateContent xmlns:mc="http://schemas.openxmlformats.org/markup-compatibility/2006" xmlns:a14="http://schemas.microsoft.com/office/drawing/2010/main">
+        <mc:Choice Requires="a14">
           <p:sp>
             <p:nvSpPr>
               <p:cNvPr id="52" name="TextBox 51">
@@ -31165,7 +31165,7 @@
             </p:txBody>
           </p:sp>
         </mc:Choice>
-        <mc:Fallback>
+        <mc:Fallback xmlns="">
           <p:sp>
             <p:nvSpPr>
               <p:cNvPr id="52" name="TextBox 51">
@@ -31210,8 +31210,8 @@
           </p:sp>
         </mc:Fallback>
       </mc:AlternateContent>
-      <mc:AlternateContent xmlns:mc="http://schemas.openxmlformats.org/markup-compatibility/2006">
-        <mc:Choice xmlns:a14="http://schemas.microsoft.com/office/drawing/2010/main" Requires="a14">
+      <mc:AlternateContent xmlns:mc="http://schemas.openxmlformats.org/markup-compatibility/2006" xmlns:a14="http://schemas.microsoft.com/office/drawing/2010/main">
+        <mc:Choice Requires="a14">
           <p:sp>
             <p:nvSpPr>
               <p:cNvPr id="55" name="TextBox 54">
@@ -31240,7 +31240,6 @@
               </a:bodyPr>
               <a:lstStyle/>
               <a:p>
-                <a:pPr/>
                 <a:r>
                   <a:rPr lang="en-US" sz="2800" b="0" dirty="0"/>
                   <a:t>thes{</a:t>
@@ -31578,7 +31577,7 @@
             </p:txBody>
           </p:sp>
         </mc:Choice>
-        <mc:Fallback>
+        <mc:Fallback xmlns="">
           <p:sp>
             <p:nvSpPr>
               <p:cNvPr id="55" name="TextBox 54">
